--- a/dist/초3/과학/건강과탐구/초3_과학_건강과탐구_01_관찰기록하기_학생용.pptx
+++ b/dist/초3/과학/건강과탐구/초3_과학_건강과탐구_01_관찰기록하기_학생용.pptx
@@ -120,20 +120,20 @@
   <p:extLst>
     <p:ext uri="{521415D9-36F7-43E2-AB2F-B90AF26B5E84}">
       <p14:sectionLst xmlns:p14="http://schemas.microsoft.com/office/powerpoint/2010/main">
-        <p14:section name="도입" id="{2969f2a5-9af4-3a31-cee1-5d2bdf286eb6}">
+        <p14:section name="도입" id="{c8b48774-a370-ec1a-a116-53cbb379abe8}">
           <p14:sldIdLst>
             <p14:sldId id="256"/>
             <p14:sldId id="257"/>
           </p14:sldIdLst>
         </p14:section>
-        <p14:section name="개념" id="{0ad467e4-46c8-adbe-fc2b-350f8b8de4bf}">
+        <p14:section name="개념" id="{57ec59fd-3483-0e39-f99f-3941b17804d3}">
           <p14:sldIdLst>
             <p14:sldId id="258"/>
             <p14:sldId id="261"/>
             <p14:sldId id="265"/>
           </p14:sldIdLst>
         </p14:section>
-        <p14:section name="연습" id="{c997d8cf-97a2-5c34-bdf5-0909d94382dc}">
+        <p14:section name="연습" id="{67cc6825-012c-481d-fd8f-136af53e4d03}">
           <p14:sldIdLst>
             <p14:sldId id="259"/>
             <p14:sldId id="260"/>
@@ -142,27 +142,27 @@
             <p14:sldId id="264"/>
           </p14:sldIdLst>
         </p14:section>
-        <p14:section name="개념" id="{f1cc2bb0-d53e-9726-fbea-290621c9790b}">
+        <p14:section name="개념" id="{bd4a1744-5ebf-84ed-b93b-37e21afc09ef}">
           <p14:sldIdLst/>
         </p14:section>
-        <p14:section name="연습" id="{3ce1e1ed-4983-e13c-af75-17508319f07a}">
+        <p14:section name="연습" id="{b24fa491-6a90-02cb-4d23-2aeb092793ef}">
           <p14:sldIdLst/>
         </p14:section>
-        <p14:section name="개념" id="{8aa5a551-528c-346c-27df-abc9712383b6}">
+        <p14:section name="개념" id="{7240ec39-0d72-27f3-28d3-dd90389aea2b}">
           <p14:sldIdLst/>
         </p14:section>
-        <p14:section name="확인" id="{d2dab33a-8927-78d8-e988-9243baec1894}">
+        <p14:section name="확인" id="{22eab28e-6ca5-6cc5-7af0-ed528fcc261b}">
           <p14:sldIdLst>
             <p14:sldId id="266"/>
             <p14:sldId id="267"/>
           </p14:sldIdLst>
         </p14:section>
-        <p14:section name="정리" id="{39aff0aa-41a9-49ca-f8f4-8f6171774ea8}">
+        <p14:section name="정리" id="{a6442025-b87f-0da6-3dde-f7fd25f911ca}">
           <p14:sldIdLst>
             <p14:sldId id="268"/>
           </p14:sldIdLst>
         </p14:section>
-        <p14:section name="보충" id="{35ec5bb1-3fca-f22c-be35-5594eb0a4f96}">
+        <p14:section name="보충" id="{096dbd0d-fff6-550c-dfe9-ea5f4209f369}">
           <p14:sldIdLst>
             <p14:sldId id="269"/>
           </p14:sldIdLst>
